--- a/presentation.pptx
+++ b/presentation.pptx
@@ -5,7 +5,7 @@
     <p:sldMasterId id="2147483672" r:id="rId1"/>
   </p:sldMasterIdLst>
   <p:notesMasterIdLst>
-    <p:notesMasterId r:id="rId22"/>
+    <p:notesMasterId r:id="rId21"/>
   </p:notesMasterIdLst>
   <p:sldIdLst>
     <p:sldId id="298" r:id="rId2"/>
@@ -25,9 +25,8 @@
     <p:sldId id="312" r:id="rId16"/>
     <p:sldId id="313" r:id="rId17"/>
     <p:sldId id="314" r:id="rId18"/>
-    <p:sldId id="315" r:id="rId19"/>
-    <p:sldId id="317" r:id="rId20"/>
-    <p:sldId id="316" r:id="rId21"/>
+    <p:sldId id="317" r:id="rId19"/>
+    <p:sldId id="316" r:id="rId20"/>
   </p:sldIdLst>
   <p:sldSz cx="12192000" cy="6858000"/>
   <p:notesSz cx="6858000" cy="9144000"/>
@@ -265,7 +264,7 @@
       <p15:sldGuideLst xmlns:p15="http://schemas.microsoft.com/office/powerpoint/2012/main"/>
     </p:ext>
     <p:ext uri="GoogleSlidesCustomDataVersion2">
-      <go:slidesCustomData xmlns:go="http://customooxmlschemas.google.com/" xmlns:ahyp="http://schemas.microsoft.com/office/drawing/2018/hyperlinkcolor" xmlns:p15="http://schemas.microsoft.com/office/powerpoint/2012/main" xmlns:p14="http://schemas.microsoft.com/office/powerpoint/2010/main" xmlns:com="http://schemas.openxmlformats.org/drawingml/2006/compatibility" xmlns:pvml="urn:schemas-microsoft-com:office:powerpoint" xmlns:v="urn:schemas-microsoft-com:vml" xmlns:o="urn:schemas-microsoft-com:office:office" xmlns:dgm="http://schemas.openxmlformats.org/drawingml/2006/diagram" xmlns:c="http://schemas.openxmlformats.org/drawingml/2006/chart" xmlns:mv="urn:schemas-microsoft-com:mac:vml" xmlns:mc="http://schemas.openxmlformats.org/markup-compatibility/2006" xmlns="" r:id="rId25" roundtripDataSignature="AMtx7mjrFOMK7ZbQ2xBh6i/2EWi8W12vDw=="/>
+      <go:slidesCustomData xmlns="" xmlns:mc="http://schemas.openxmlformats.org/markup-compatibility/2006" xmlns:mv="urn:schemas-microsoft-com:mac:vml" xmlns:c="http://schemas.openxmlformats.org/drawingml/2006/chart" xmlns:dgm="http://schemas.openxmlformats.org/drawingml/2006/diagram" xmlns:o="urn:schemas-microsoft-com:office:office" xmlns:v="urn:schemas-microsoft-com:vml" xmlns:pvml="urn:schemas-microsoft-com:office:powerpoint" xmlns:com="http://schemas.openxmlformats.org/drawingml/2006/compatibility" xmlns:p14="http://schemas.microsoft.com/office/powerpoint/2010/main" xmlns:p15="http://schemas.microsoft.com/office/powerpoint/2012/main" xmlns:ahyp="http://schemas.microsoft.com/office/drawing/2018/hyperlinkcolor" xmlns:go="http://customooxmlschemas.google.com/" r:id="rId25" roundtripDataSignature="AMtx7mjrFOMK7ZbQ2xBh6i/2EWi8W12vDw=="/>
     </p:ext>
   </p:extLst>
 </p:presentation>
@@ -1653,110 +1652,6 @@
   <p:cSld>
     <p:spTree>
       <p:nvGrpSpPr>
-        <p:cNvPr id="1" name="Shape 205"/>
-        <p:cNvGrpSpPr/>
-        <p:nvPr/>
-      </p:nvGrpSpPr>
-      <p:grpSpPr>
-        <a:xfrm>
-          <a:off x="0" y="0"/>
-          <a:ext cx="0" cy="0"/>
-          <a:chOff x="0" y="0"/>
-          <a:chExt cx="0" cy="0"/>
-        </a:xfrm>
-      </p:grpSpPr>
-      <p:sp>
-        <p:nvSpPr>
-          <p:cNvPr id="206" name="Google Shape;206;g3ddd71485ef_0_72:notes"/>
-          <p:cNvSpPr>
-            <a:spLocks noGrp="1" noRot="1" noChangeAspect="1"/>
-          </p:cNvSpPr>
-          <p:nvPr>
-            <p:ph type="sldImg" idx="2"/>
-          </p:nvPr>
-        </p:nvSpPr>
-        <p:spPr>
-          <a:xfrm>
-            <a:off x="381000" y="685800"/>
-            <a:ext cx="6096000" cy="3429000"/>
-          </a:xfrm>
-          <a:custGeom>
-            <a:avLst/>
-            <a:gdLst/>
-            <a:ahLst/>
-            <a:cxnLst/>
-            <a:rect l="l" t="t" r="r" b="b"/>
-            <a:pathLst>
-              <a:path w="120000" h="120000" extrusionOk="0">
-                <a:moveTo>
-                  <a:pt x="0" y="0"/>
-                </a:moveTo>
-                <a:lnTo>
-                  <a:pt x="120000" y="0"/>
-                </a:lnTo>
-                <a:lnTo>
-                  <a:pt x="120000" y="120000"/>
-                </a:lnTo>
-                <a:lnTo>
-                  <a:pt x="0" y="120000"/>
-                </a:lnTo>
-                <a:close/>
-              </a:path>
-            </a:pathLst>
-          </a:custGeom>
-        </p:spPr>
-      </p:sp>
-      <p:sp>
-        <p:nvSpPr>
-          <p:cNvPr id="207" name="Google Shape;207;g3ddd71485ef_0_72:notes"/>
-          <p:cNvSpPr txBox="1">
-            <a:spLocks noGrp="1"/>
-          </p:cNvSpPr>
-          <p:nvPr>
-            <p:ph type="body" idx="1"/>
-          </p:nvPr>
-        </p:nvSpPr>
-        <p:spPr>
-          <a:xfrm>
-            <a:off x="685800" y="4343400"/>
-            <a:ext cx="5486400" cy="4114800"/>
-          </a:xfrm>
-          <a:prstGeom prst="rect">
-            <a:avLst/>
-          </a:prstGeom>
-        </p:spPr>
-        <p:txBody>
-          <a:bodyPr spcFirstLastPara="1" wrap="square" lIns="91425" tIns="91425" rIns="91425" bIns="91425" anchor="t" anchorCtr="0">
-            <a:noAutofit/>
-          </a:bodyPr>
-          <a:lstStyle/>
-          <a:p>
-            <a:pPr marL="0" lvl="0" indent="0" algn="l" rtl="0">
-              <a:spcBef>
-                <a:spcPts val="0"/>
-              </a:spcBef>
-              <a:spcAft>
-                <a:spcPts val="0"/>
-              </a:spcAft>
-              <a:buNone/>
-            </a:pPr>
-            <a:endParaRPr/>
-          </a:p>
-        </p:txBody>
-      </p:sp>
-    </p:spTree>
-  </p:cSld>
-  <p:clrMapOvr>
-    <a:masterClrMapping/>
-  </p:clrMapOvr>
-</p:notes>
-</file>
-
-<file path=ppt/notesSlides/notesSlide19.xml><?xml version="1.0" encoding="utf-8"?>
-<p:notes xmlns:a="http://schemas.openxmlformats.org/drawingml/2006/main" xmlns:r="http://schemas.openxmlformats.org/officeDocument/2006/relationships" xmlns:p="http://schemas.openxmlformats.org/presentationml/2006/main" showMasterSp="0" showMasterPhAnim="0">
-  <p:cSld>
-    <p:spTree>
-      <p:nvGrpSpPr>
         <p:cNvPr id="1" name="Shape 211"/>
         <p:cNvGrpSpPr/>
         <p:nvPr/>
@@ -1856,111 +1751,7 @@
 </p:notes>
 </file>
 
-<file path=ppt/notesSlides/notesSlide2.xml><?xml version="1.0" encoding="utf-8"?>
-<p:notes xmlns:a="http://schemas.openxmlformats.org/drawingml/2006/main" xmlns:r="http://schemas.openxmlformats.org/officeDocument/2006/relationships" xmlns:p="http://schemas.openxmlformats.org/presentationml/2006/main" showMasterSp="0" showMasterPhAnim="0">
-  <p:cSld>
-    <p:spTree>
-      <p:nvGrpSpPr>
-        <p:cNvPr id="1" name="Shape 86"/>
-        <p:cNvGrpSpPr/>
-        <p:nvPr/>
-      </p:nvGrpSpPr>
-      <p:grpSpPr>
-        <a:xfrm>
-          <a:off x="0" y="0"/>
-          <a:ext cx="0" cy="0"/>
-          <a:chOff x="0" y="0"/>
-          <a:chExt cx="0" cy="0"/>
-        </a:xfrm>
-      </p:grpSpPr>
-      <p:sp>
-        <p:nvSpPr>
-          <p:cNvPr id="87" name="Google Shape;87;p2:notes"/>
-          <p:cNvSpPr txBox="1">
-            <a:spLocks noGrp="1"/>
-          </p:cNvSpPr>
-          <p:nvPr>
-            <p:ph type="body" idx="1"/>
-          </p:nvPr>
-        </p:nvSpPr>
-        <p:spPr>
-          <a:xfrm>
-            <a:off x="685800" y="4343400"/>
-            <a:ext cx="5486400" cy="4114800"/>
-          </a:xfrm>
-          <a:prstGeom prst="rect">
-            <a:avLst/>
-          </a:prstGeom>
-        </p:spPr>
-        <p:txBody>
-          <a:bodyPr spcFirstLastPara="1" wrap="square" lIns="91425" tIns="91425" rIns="91425" bIns="91425" anchor="t" anchorCtr="0">
-            <a:noAutofit/>
-          </a:bodyPr>
-          <a:lstStyle/>
-          <a:p>
-            <a:pPr marL="0" lvl="0" indent="0" algn="l" rtl="0">
-              <a:spcBef>
-                <a:spcPts val="0"/>
-              </a:spcBef>
-              <a:spcAft>
-                <a:spcPts val="0"/>
-              </a:spcAft>
-              <a:buNone/>
-            </a:pPr>
-            <a:endParaRPr/>
-          </a:p>
-        </p:txBody>
-      </p:sp>
-      <p:sp>
-        <p:nvSpPr>
-          <p:cNvPr id="88" name="Google Shape;88;p2:notes"/>
-          <p:cNvSpPr>
-            <a:spLocks noGrp="1" noRot="1" noChangeAspect="1"/>
-          </p:cNvSpPr>
-          <p:nvPr>
-            <p:ph type="sldImg" idx="2"/>
-          </p:nvPr>
-        </p:nvSpPr>
-        <p:spPr>
-          <a:xfrm>
-            <a:off x="381000" y="685800"/>
-            <a:ext cx="6096000" cy="3429000"/>
-          </a:xfrm>
-          <a:custGeom>
-            <a:avLst/>
-            <a:gdLst/>
-            <a:ahLst/>
-            <a:cxnLst/>
-            <a:rect l="l" t="t" r="r" b="b"/>
-            <a:pathLst>
-              <a:path w="120000" h="120000" extrusionOk="0">
-                <a:moveTo>
-                  <a:pt x="0" y="0"/>
-                </a:moveTo>
-                <a:lnTo>
-                  <a:pt x="120000" y="0"/>
-                </a:lnTo>
-                <a:lnTo>
-                  <a:pt x="120000" y="120000"/>
-                </a:lnTo>
-                <a:lnTo>
-                  <a:pt x="0" y="120000"/>
-                </a:lnTo>
-                <a:close/>
-              </a:path>
-            </a:pathLst>
-          </a:custGeom>
-        </p:spPr>
-      </p:sp>
-    </p:spTree>
-  </p:cSld>
-  <p:clrMapOvr>
-    <a:masterClrMapping/>
-  </p:clrMapOvr>
-</p:notes>
-</file>
-
-<file path=ppt/notesSlides/notesSlide20.xml><?xml version="1.0" encoding="utf-8"?>
+<file path=ppt/notesSlides/notesSlide19.xml><?xml version="1.0" encoding="utf-8"?>
 <p:notes xmlns:a="http://schemas.openxmlformats.org/drawingml/2006/main" xmlns:r="http://schemas.openxmlformats.org/officeDocument/2006/relationships" xmlns:p="http://schemas.openxmlformats.org/presentationml/2006/main" showMasterSp="0" showMasterPhAnim="0">
   <p:cSld>
     <p:spTree>
@@ -2055,6 +1846,110 @@
             <a:endParaRPr/>
           </a:p>
         </p:txBody>
+      </p:sp>
+    </p:spTree>
+  </p:cSld>
+  <p:clrMapOvr>
+    <a:masterClrMapping/>
+  </p:clrMapOvr>
+</p:notes>
+</file>
+
+<file path=ppt/notesSlides/notesSlide2.xml><?xml version="1.0" encoding="utf-8"?>
+<p:notes xmlns:a="http://schemas.openxmlformats.org/drawingml/2006/main" xmlns:r="http://schemas.openxmlformats.org/officeDocument/2006/relationships" xmlns:p="http://schemas.openxmlformats.org/presentationml/2006/main" showMasterSp="0" showMasterPhAnim="0">
+  <p:cSld>
+    <p:spTree>
+      <p:nvGrpSpPr>
+        <p:cNvPr id="1" name="Shape 86"/>
+        <p:cNvGrpSpPr/>
+        <p:nvPr/>
+      </p:nvGrpSpPr>
+      <p:grpSpPr>
+        <a:xfrm>
+          <a:off x="0" y="0"/>
+          <a:ext cx="0" cy="0"/>
+          <a:chOff x="0" y="0"/>
+          <a:chExt cx="0" cy="0"/>
+        </a:xfrm>
+      </p:grpSpPr>
+      <p:sp>
+        <p:nvSpPr>
+          <p:cNvPr id="87" name="Google Shape;87;p2:notes"/>
+          <p:cNvSpPr txBox="1">
+            <a:spLocks noGrp="1"/>
+          </p:cNvSpPr>
+          <p:nvPr>
+            <p:ph type="body" idx="1"/>
+          </p:nvPr>
+        </p:nvSpPr>
+        <p:spPr>
+          <a:xfrm>
+            <a:off x="685800" y="4343400"/>
+            <a:ext cx="5486400" cy="4114800"/>
+          </a:xfrm>
+          <a:prstGeom prst="rect">
+            <a:avLst/>
+          </a:prstGeom>
+        </p:spPr>
+        <p:txBody>
+          <a:bodyPr spcFirstLastPara="1" wrap="square" lIns="91425" tIns="91425" rIns="91425" bIns="91425" anchor="t" anchorCtr="0">
+            <a:noAutofit/>
+          </a:bodyPr>
+          <a:lstStyle/>
+          <a:p>
+            <a:pPr marL="0" lvl="0" indent="0" algn="l" rtl="0">
+              <a:spcBef>
+                <a:spcPts val="0"/>
+              </a:spcBef>
+              <a:spcAft>
+                <a:spcPts val="0"/>
+              </a:spcAft>
+              <a:buNone/>
+            </a:pPr>
+            <a:endParaRPr/>
+          </a:p>
+        </p:txBody>
+      </p:sp>
+      <p:sp>
+        <p:nvSpPr>
+          <p:cNvPr id="88" name="Google Shape;88;p2:notes"/>
+          <p:cNvSpPr>
+            <a:spLocks noGrp="1" noRot="1" noChangeAspect="1"/>
+          </p:cNvSpPr>
+          <p:nvPr>
+            <p:ph type="sldImg" idx="2"/>
+          </p:nvPr>
+        </p:nvSpPr>
+        <p:spPr>
+          <a:xfrm>
+            <a:off x="381000" y="685800"/>
+            <a:ext cx="6096000" cy="3429000"/>
+          </a:xfrm>
+          <a:custGeom>
+            <a:avLst/>
+            <a:gdLst/>
+            <a:ahLst/>
+            <a:cxnLst/>
+            <a:rect l="l" t="t" r="r" b="b"/>
+            <a:pathLst>
+              <a:path w="120000" h="120000" extrusionOk="0">
+                <a:moveTo>
+                  <a:pt x="0" y="0"/>
+                </a:moveTo>
+                <a:lnTo>
+                  <a:pt x="120000" y="0"/>
+                </a:lnTo>
+                <a:lnTo>
+                  <a:pt x="120000" y="120000"/>
+                </a:lnTo>
+                <a:lnTo>
+                  <a:pt x="0" y="120000"/>
+                </a:lnTo>
+                <a:close/>
+              </a:path>
+            </a:pathLst>
+          </a:custGeom>
+        </p:spPr>
       </p:sp>
     </p:spTree>
   </p:cSld>
@@ -14896,222 +14791,6 @@
   <p:cSld>
     <p:spTree>
       <p:nvGrpSpPr>
-        <p:cNvPr id="1" name="Shape 208"/>
-        <p:cNvGrpSpPr/>
-        <p:nvPr/>
-      </p:nvGrpSpPr>
-      <p:grpSpPr>
-        <a:xfrm>
-          <a:off x="0" y="0"/>
-          <a:ext cx="0" cy="0"/>
-          <a:chOff x="0" y="0"/>
-          <a:chExt cx="0" cy="0"/>
-        </a:xfrm>
-      </p:grpSpPr>
-      <p:sp>
-        <p:nvSpPr>
-          <p:cNvPr id="209" name="Google Shape;209;g3ddd71485ef_0_72"/>
-          <p:cNvSpPr txBox="1">
-            <a:spLocks noGrp="1"/>
-          </p:cNvSpPr>
-          <p:nvPr>
-            <p:ph type="title"/>
-          </p:nvPr>
-        </p:nvSpPr>
-        <p:spPr>
-          <a:prstGeom prst="rect">
-            <a:avLst/>
-          </a:prstGeom>
-        </p:spPr>
-        <p:txBody>
-          <a:bodyPr spcFirstLastPara="1" wrap="square" lIns="91425" tIns="45700" rIns="91425" bIns="45700" anchor="ctr" anchorCtr="0">
-            <a:normAutofit/>
-          </a:bodyPr>
-          <a:lstStyle/>
-          <a:p>
-            <a:pPr>
-              <a:buNone/>
-            </a:pPr>
-            <a:r>
-              <a:rPr lang="ru-RU" sz="5400" b="0" dirty="0">
-                <a:solidFill>
-                  <a:srgbClr val="1B3A5C"/>
-                </a:solidFill>
-              </a:rPr>
-              <a:t>Выводы</a:t>
-            </a:r>
-          </a:p>
-        </p:txBody>
-      </p:sp>
-      <p:sp>
-        <p:nvSpPr>
-          <p:cNvPr id="210" name="Google Shape;210;g3ddd71485ef_0_72"/>
-          <p:cNvSpPr txBox="1">
-            <a:spLocks noGrp="1"/>
-          </p:cNvSpPr>
-          <p:nvPr>
-            <p:ph type="body" idx="1"/>
-          </p:nvPr>
-        </p:nvSpPr>
-        <p:spPr>
-          <a:prstGeom prst="rect">
-            <a:avLst/>
-          </a:prstGeom>
-        </p:spPr>
-        <p:txBody>
-          <a:bodyPr spcFirstLastPara="1" wrap="square" lIns="91425" tIns="45700" rIns="91425" bIns="45700" anchor="t" anchorCtr="0">
-            <a:normAutofit/>
-          </a:bodyPr>
-          <a:lstStyle/>
-          <a:p>
-            <a:pPr marL="228600" indent="-228600">
-              <a:lnSpc>
-                <a:spcPts val="2200"/>
-              </a:lnSpc>
-              <a:spcAft>
-                <a:spcPts val="400"/>
-              </a:spcAft>
-              <a:buClr>
-                <a:srgbClr val="5B8DBF"/>
-              </a:buClr>
-              <a:buFont typeface="Arial"/>
-              <a:buChar char="•"/>
-            </a:pPr>
-            <a:r>
-              <a:rPr lang="ru-RU" sz="1900" dirty="0">
-                <a:solidFill>
-                  <a:srgbClr val="1B3A5C"/>
-                </a:solidFill>
-              </a:rPr>
-              <a:t>Эффект высшего образования на здоровье </a:t>
-            </a:r>
-            <a:r>
-              <a:rPr lang="ru-RU" sz="1900" b="1" dirty="0">
-                <a:solidFill>
-                  <a:srgbClr val="2E5984"/>
-                </a:solidFill>
-              </a:rPr>
-              <a:t>существует</a:t>
-            </a:r>
-            <a:r>
-              <a:rPr lang="ru-RU" sz="1900" dirty="0">
-                <a:solidFill>
-                  <a:srgbClr val="1B3A5C"/>
-                </a:solidFill>
-              </a:rPr>
-              <a:t> и хорошо ловится Probit + мэтчингом и Double ML.</a:t>
-            </a:r>
-          </a:p>
-          <a:p>
-            <a:pPr marL="228600" indent="-228600">
-              <a:lnSpc>
-                <a:spcPts val="2200"/>
-              </a:lnSpc>
-              <a:spcAft>
-                <a:spcPts val="400"/>
-              </a:spcAft>
-              <a:buClr>
-                <a:srgbClr val="5B8DBF"/>
-              </a:buClr>
-              <a:buFont typeface="Arial"/>
-              <a:buChar char="•"/>
-            </a:pPr>
-            <a:r>
-              <a:rPr lang="ru-RU" sz="1900" dirty="0">
-                <a:solidFill>
-                  <a:srgbClr val="1B3A5C"/>
-                </a:solidFill>
-              </a:rPr>
-              <a:t>Знак и сила эффекта зависят от пола, возраста и конкретного заболевания — </a:t>
-            </a:r>
-            <a:r>
-              <a:rPr lang="ru-RU" sz="1900" b="1" dirty="0">
-                <a:solidFill>
-                  <a:srgbClr val="2E5984"/>
-                </a:solidFill>
-              </a:rPr>
-              <a:t>универсального ответа нет</a:t>
-            </a:r>
-            <a:r>
-              <a:rPr lang="ru-RU" sz="1900" dirty="0">
-                <a:solidFill>
-                  <a:srgbClr val="1B3A5C"/>
-                </a:solidFill>
-              </a:rPr>
-              <a:t>.</a:t>
-            </a:r>
-          </a:p>
-          <a:p>
-            <a:pPr marL="228600" indent="-228600">
-              <a:lnSpc>
-                <a:spcPts val="2200"/>
-              </a:lnSpc>
-              <a:spcAft>
-                <a:spcPts val="400"/>
-              </a:spcAft>
-              <a:buClr>
-                <a:srgbClr val="5B8DBF"/>
-              </a:buClr>
-              <a:buFont typeface="Arial"/>
-              <a:buChar char="•"/>
-            </a:pPr>
-            <a:r>
-              <a:rPr lang="ru-RU" sz="1900" dirty="0">
-                <a:solidFill>
-                  <a:srgbClr val="1B3A5C"/>
-                </a:solidFill>
-              </a:rPr>
-              <a:t>Часть «негативных» эффектов у мужчин — это, скорее всего, рост выявляемости через медобследования.</a:t>
-            </a:r>
-          </a:p>
-          <a:p>
-            <a:pPr marL="228600" indent="-228600">
-              <a:lnSpc>
-                <a:spcPts val="2200"/>
-              </a:lnSpc>
-              <a:buClr>
-                <a:srgbClr val="5B8DBF"/>
-              </a:buClr>
-              <a:buFont typeface="Arial"/>
-              <a:buChar char="•"/>
-            </a:pPr>
-            <a:r>
-              <a:rPr lang="ru-RU" sz="1900" b="1" dirty="0">
-                <a:solidFill>
-                  <a:srgbClr val="2E5984"/>
-                </a:solidFill>
-              </a:rPr>
-              <a:t>Дальше: </a:t>
-            </a:r>
-            <a:r>
-              <a:rPr lang="ru-RU" sz="1900" dirty="0">
-                <a:solidFill>
-                  <a:srgbClr val="1B3A5C"/>
-                </a:solidFill>
-              </a:rPr>
-              <a:t>панельные данные, причинные графы и более тонкие инструменты идентификации.</a:t>
-            </a:r>
-          </a:p>
-        </p:txBody>
-      </p:sp>
-    </p:spTree>
-    <p:extLst>
-      <p:ext uri="{BB962C8B-B14F-4D97-AF65-F5344CB8AC3E}">
-        <p14:creationId xmlns:p14="http://schemas.microsoft.com/office/powerpoint/2010/main" val="66470510"/>
-      </p:ext>
-    </p:extLst>
-  </p:cSld>
-  <p:clrMapOvr>
-    <a:masterClrMapping/>
-  </p:clrMapOvr>
-</p:sld>
-</file>
-
-<file path=ppt/slides/slide19.xml><?xml version="1.0" encoding="utf-8"?>
-<p:sld xmlns:a="http://schemas.openxmlformats.org/drawingml/2006/main" xmlns:r="http://schemas.openxmlformats.org/officeDocument/2006/relationships" xmlns:p="http://schemas.openxmlformats.org/presentationml/2006/main">
-  <p:cSld>
-    <p:spTree>
-      <p:nvGrpSpPr>
         <p:cNvPr id="1" name="Shape 214"/>
         <p:cNvGrpSpPr/>
         <p:nvPr/>
@@ -15183,6 +14862,91 @@
     <p:extLst>
       <p:ext uri="{BB962C8B-B14F-4D97-AF65-F5344CB8AC3E}">
         <p14:creationId xmlns:p14="http://schemas.microsoft.com/office/powerpoint/2010/main" val="1550175768"/>
+      </p:ext>
+    </p:extLst>
+  </p:cSld>
+  <p:clrMapOvr>
+    <a:masterClrMapping/>
+  </p:clrMapOvr>
+</p:sld>
+</file>
+
+<file path=ppt/slides/slide19.xml><?xml version="1.0" encoding="utf-8"?>
+<p:sld xmlns:a="http://schemas.openxmlformats.org/drawingml/2006/main" xmlns:r="http://schemas.openxmlformats.org/officeDocument/2006/relationships" xmlns:p="http://schemas.openxmlformats.org/presentationml/2006/main">
+  <p:cSld>
+    <p:spTree>
+      <p:nvGrpSpPr>
+        <p:cNvPr id="1" name="Shape 219"/>
+        <p:cNvGrpSpPr/>
+        <p:nvPr/>
+      </p:nvGrpSpPr>
+      <p:grpSpPr>
+        <a:xfrm>
+          <a:off x="0" y="0"/>
+          <a:ext cx="0" cy="0"/>
+          <a:chOff x="0" y="0"/>
+          <a:chExt cx="0" cy="0"/>
+        </a:xfrm>
+      </p:grpSpPr>
+      <p:sp>
+        <p:nvSpPr>
+          <p:cNvPr id="220" name="Google Shape;220;g3ddbe69b425_1_5"/>
+          <p:cNvSpPr txBox="1">
+            <a:spLocks noGrp="1"/>
+          </p:cNvSpPr>
+          <p:nvPr>
+            <p:ph type="title"/>
+          </p:nvPr>
+        </p:nvSpPr>
+        <p:spPr>
+          <a:xfrm>
+            <a:off x="1524000" y="2540000"/>
+            <a:ext cx="9144000" cy="1778000"/>
+          </a:xfrm>
+          <a:prstGeom prst="rect">
+            <a:avLst/>
+          </a:prstGeom>
+        </p:spPr>
+        <p:txBody>
+          <a:bodyPr spcFirstLastPara="1" wrap="square" lIns="91425" tIns="45700" rIns="91425" bIns="45700" anchor="ctr" anchorCtr="0">
+            <a:normAutofit/>
+          </a:bodyPr>
+          <a:lstStyle/>
+          <a:p>
+            <a:pPr algn="ctr">
+              <a:buNone/>
+            </a:pPr>
+            <a:r>
+              <a:rPr lang="ru-RU" sz="7200" b="0" dirty="0">
+                <a:solidFill>
+                  <a:srgbClr val="1B3A5C"/>
+                </a:solidFill>
+              </a:rPr>
+              <a:t>Спасибо</a:t>
+            </a:r>
+          </a:p>
+          <a:p>
+            <a:pPr algn="ctr">
+              <a:spcBef>
+                <a:spcPts val="400"/>
+              </a:spcBef>
+              <a:buNone/>
+            </a:pPr>
+            <a:r>
+              <a:rPr lang="ru-RU" sz="2200" i="1" dirty="0">
+                <a:solidFill>
+                  <a:srgbClr val="5B8DBF"/>
+                </a:solidFill>
+              </a:rPr>
+              <a:t>А. Карасев · Л. Панчеха · М. Удовиченко</a:t>
+            </a:r>
+          </a:p>
+        </p:txBody>
+      </p:sp>
+    </p:spTree>
+    <p:extLst>
+      <p:ext uri="{BB962C8B-B14F-4D97-AF65-F5344CB8AC3E}">
+        <p14:creationId xmlns:p14="http://schemas.microsoft.com/office/powerpoint/2010/main" val="3089108731"/>
       </p:ext>
     </p:extLst>
   </p:cSld>
@@ -15494,91 +15258,6 @@
     <p:extLst>
       <p:ext uri="{BB962C8B-B14F-4D97-AF65-F5344CB8AC3E}">
         <p14:creationId xmlns:p14="http://schemas.microsoft.com/office/powerpoint/2010/main" val="3879331199"/>
-      </p:ext>
-    </p:extLst>
-  </p:cSld>
-  <p:clrMapOvr>
-    <a:masterClrMapping/>
-  </p:clrMapOvr>
-</p:sld>
-</file>
-
-<file path=ppt/slides/slide20.xml><?xml version="1.0" encoding="utf-8"?>
-<p:sld xmlns:a="http://schemas.openxmlformats.org/drawingml/2006/main" xmlns:r="http://schemas.openxmlformats.org/officeDocument/2006/relationships" xmlns:p="http://schemas.openxmlformats.org/presentationml/2006/main">
-  <p:cSld>
-    <p:spTree>
-      <p:nvGrpSpPr>
-        <p:cNvPr id="1" name="Shape 219"/>
-        <p:cNvGrpSpPr/>
-        <p:nvPr/>
-      </p:nvGrpSpPr>
-      <p:grpSpPr>
-        <a:xfrm>
-          <a:off x="0" y="0"/>
-          <a:ext cx="0" cy="0"/>
-          <a:chOff x="0" y="0"/>
-          <a:chExt cx="0" cy="0"/>
-        </a:xfrm>
-      </p:grpSpPr>
-      <p:sp>
-        <p:nvSpPr>
-          <p:cNvPr id="220" name="Google Shape;220;g3ddbe69b425_1_5"/>
-          <p:cNvSpPr txBox="1">
-            <a:spLocks noGrp="1"/>
-          </p:cNvSpPr>
-          <p:nvPr>
-            <p:ph type="title"/>
-          </p:nvPr>
-        </p:nvSpPr>
-        <p:spPr>
-          <a:xfrm>
-            <a:off x="1524000" y="2540000"/>
-            <a:ext cx="9144000" cy="1778000"/>
-          </a:xfrm>
-          <a:prstGeom prst="rect">
-            <a:avLst/>
-          </a:prstGeom>
-        </p:spPr>
-        <p:txBody>
-          <a:bodyPr spcFirstLastPara="1" wrap="square" lIns="91425" tIns="45700" rIns="91425" bIns="45700" anchor="ctr" anchorCtr="0">
-            <a:normAutofit/>
-          </a:bodyPr>
-          <a:lstStyle/>
-          <a:p>
-            <a:pPr algn="ctr">
-              <a:buNone/>
-            </a:pPr>
-            <a:r>
-              <a:rPr lang="ru-RU" sz="7200" b="0" dirty="0">
-                <a:solidFill>
-                  <a:srgbClr val="1B3A5C"/>
-                </a:solidFill>
-              </a:rPr>
-              <a:t>Спасибо</a:t>
-            </a:r>
-          </a:p>
-          <a:p>
-            <a:pPr algn="ctr">
-              <a:spcBef>
-                <a:spcPts val="400"/>
-              </a:spcBef>
-              <a:buNone/>
-            </a:pPr>
-            <a:r>
-              <a:rPr lang="ru-RU" sz="2200" i="1" dirty="0">
-                <a:solidFill>
-                  <a:srgbClr val="5B8DBF"/>
-                </a:solidFill>
-              </a:rPr>
-              <a:t>А. Карасев · Л. Панчеха · М. Удовиченко</a:t>
-            </a:r>
-          </a:p>
-        </p:txBody>
-      </p:sp>
-    </p:spTree>
-    <p:extLst>
-      <p:ext uri="{BB962C8B-B14F-4D97-AF65-F5344CB8AC3E}">
-        <p14:creationId xmlns:p14="http://schemas.microsoft.com/office/powerpoint/2010/main" val="3089108731"/>
       </p:ext>
     </p:extLst>
   </p:cSld>
